--- a/dist/초3/수학/도형과측정/초3_수학_도형과측정_07_무게_학생용.pptx
+++ b/dist/초3/수학/도형과측정/초3_수학_도형과측정_07_무게_학생용.pptx
@@ -121,13 +121,13 @@
   <p:extLst>
     <p:ext uri="{521415D9-36F7-43E2-AB2F-B90AF26B5E84}">
       <p14:sectionLst xmlns:p14="http://schemas.microsoft.com/office/powerpoint/2010/main">
-        <p14:section name="도입" id="{bcf16f50-a38a-20d2-1a8e-0a3b7595a8f3}">
+        <p14:section name="도입" id="{4cafaefd-4c3a-66e4-c5fb-d63ee2979ded}">
           <p14:sldIdLst>
             <p14:sldId id="256"/>
             <p14:sldId id="257"/>
           </p14:sldIdLst>
         </p14:section>
-        <p14:section name="개념" id="{535ef7ba-dcf6-1a5e-9be8-f55763da7f1a}">
+        <p14:section name="개념" id="{412ef680-987e-2d5e-d205-2e03a91f06bc}">
           <p14:sldIdLst>
             <p14:sldId id="258"/>
             <p14:sldId id="259"/>
@@ -137,31 +137,31 @@
             <p14:sldId id="265"/>
           </p14:sldIdLst>
         </p14:section>
-        <p14:section name="연습" id="{07169f57-ca74-b32c-a536-f88f6fea752d}">
+        <p14:section name="연습" id="{611028aa-f2d7-e9d2-034f-1a2d631eac6f}">
           <p14:sldIdLst>
             <p14:sldId id="262"/>
             <p14:sldId id="263"/>
             <p14:sldId id="266"/>
           </p14:sldIdLst>
         </p14:section>
-        <p14:section name="개념" id="{6f9d5f80-52ff-557e-4727-0134a6f47643}">
+        <p14:section name="개념" id="{82f8c273-223d-be0c-33ba-8578886e499c}">
           <p14:sldIdLst/>
         </p14:section>
-        <p14:section name="연습" id="{2a13b3be-a8bc-1e93-4185-5912c0970d02}">
+        <p14:section name="연습" id="{32a3b8a4-9266-dc9f-9205-8e2d815ccfa8}">
           <p14:sldIdLst/>
         </p14:section>
-        <p14:section name="확인" id="{cb144021-2b40-b4e1-3b27-2cb3f6341f08}">
+        <p14:section name="확인" id="{719d15ee-3275-1940-5f6b-460f5752b549}">
           <p14:sldIdLst>
             <p14:sldId id="267"/>
             <p14:sldId id="268"/>
           </p14:sldIdLst>
         </p14:section>
-        <p14:section name="정리" id="{5637b769-f4b7-606d-6ca9-3ff78b162e30}">
+        <p14:section name="정리" id="{8e39367c-e8b8-14e1-fd62-2c48741203ff}">
           <p14:sldIdLst>
             <p14:sldId id="269"/>
           </p14:sldIdLst>
         </p14:section>
-        <p14:section name="보충" id="{23b76304-73b2-8fde-e265-484810d91d6f}">
+        <p14:section name="보충" id="{76db57a1-b708-e87e-4ff3-40a8db5380be}">
           <p14:sldIdLst>
             <p14:sldId id="270"/>
           </p14:sldIdLst>
@@ -3509,8 +3509,8 @@
         </p:nvSpPr>
         <p:spPr>
           <a:xfrm>
-            <a:off x="9491472" y="1171956"/>
-            <a:ext cx="310896" cy="381000"/>
+            <a:off x="9545955" y="1275143"/>
+            <a:ext cx="201930" cy="174625"/>
           </a:xfrm>
           <a:prstGeom prst="rect">
             <a:avLst/>
@@ -3526,7 +3526,7 @@
               <a:buNone/>
             </a:pPr>
             <a:r>
-              <a:rPr lang="ko-KR" altLang="en-US" sz="2400" b="1" dirty="0">
+              <a:rPr lang="ko-KR" altLang="en-US" sz="1100" b="1" dirty="0">
                 <a:solidFill>
                   <a:srgbClr val="1F2937"/>
                 </a:solidFill>
@@ -3536,7 +3536,7 @@
               </a:rPr>
               <a:t>0</a:t>
             </a:r>
-            <a:endParaRPr lang="ko-KR" sz="2400" dirty="0"/>
+            <a:endParaRPr lang="ko-KR" sz="1100" dirty="0"/>
           </a:p>
         </p:txBody>
       </p:sp>
@@ -3548,8 +3548,8 @@
         </p:nvSpPr>
         <p:spPr>
           <a:xfrm>
-            <a:off x="10030968" y="1912620"/>
-            <a:ext cx="713232" cy="381000"/>
+            <a:off x="10194417" y="2015807"/>
+            <a:ext cx="386334" cy="174625"/>
           </a:xfrm>
           <a:prstGeom prst="rect">
             <a:avLst/>
@@ -3565,7 +3565,7 @@
               <a:buNone/>
             </a:pPr>
             <a:r>
-              <a:rPr lang="ko-KR" altLang="en-US" sz="2400" b="1" dirty="0">
+              <a:rPr lang="ko-KR" altLang="en-US" sz="1100" b="1" dirty="0">
                 <a:solidFill>
                   <a:srgbClr val="1F2937"/>
                 </a:solidFill>
@@ -3575,7 +3575,7 @@
               </a:rPr>
               <a:t>500</a:t>
             </a:r>
-            <a:endParaRPr lang="ko-KR" sz="2400" dirty="0"/>
+            <a:endParaRPr lang="ko-KR" sz="1100" dirty="0"/>
           </a:p>
         </p:txBody>
       </p:sp>
@@ -3587,8 +3587,8 @@
         </p:nvSpPr>
         <p:spPr>
           <a:xfrm>
-            <a:off x="9189720" y="2653284"/>
-            <a:ext cx="914400" cy="381000"/>
+            <a:off x="9407652" y="2756472"/>
+            <a:ext cx="478536" cy="174625"/>
           </a:xfrm>
           <a:prstGeom prst="rect">
             <a:avLst/>
@@ -3604,7 +3604,7 @@
               <a:buNone/>
             </a:pPr>
             <a:r>
-              <a:rPr lang="ko-KR" altLang="en-US" sz="2400" b="1" dirty="0">
+              <a:rPr lang="ko-KR" altLang="en-US" sz="1100" b="1" dirty="0">
                 <a:solidFill>
                   <a:srgbClr val="1F2937"/>
                 </a:solidFill>
@@ -3614,7 +3614,7 @@
               </a:rPr>
               <a:t>1000</a:t>
             </a:r>
-            <a:endParaRPr lang="ko-KR" sz="2400" dirty="0"/>
+            <a:endParaRPr lang="ko-KR" sz="1100" dirty="0"/>
           </a:p>
         </p:txBody>
       </p:sp>
@@ -3626,8 +3626,8 @@
         </p:nvSpPr>
         <p:spPr>
           <a:xfrm>
-            <a:off x="8449056" y="1912620"/>
-            <a:ext cx="914400" cy="381000"/>
+            <a:off x="8666988" y="2015807"/>
+            <a:ext cx="478536" cy="174625"/>
           </a:xfrm>
           <a:prstGeom prst="rect">
             <a:avLst/>
@@ -3643,7 +3643,7 @@
               <a:buNone/>
             </a:pPr>
             <a:r>
-              <a:rPr lang="ko-KR" altLang="en-US" sz="2400" b="1" dirty="0">
+              <a:rPr lang="ko-KR" altLang="en-US" sz="1100" b="1" dirty="0">
                 <a:solidFill>
                   <a:srgbClr val="1F2937"/>
                 </a:solidFill>
@@ -3653,7 +3653,7 @@
               </a:rPr>
               <a:t>1500</a:t>
             </a:r>
-            <a:endParaRPr lang="ko-KR" sz="2400" dirty="0"/>
+            <a:endParaRPr lang="ko-KR" sz="1100" dirty="0"/>
           </a:p>
         </p:txBody>
       </p:sp>
@@ -3665,8 +3665,8 @@
         </p:nvSpPr>
         <p:spPr>
           <a:xfrm>
-            <a:off x="9323832" y="1528572"/>
-            <a:ext cx="646176" cy="381000"/>
+            <a:off x="9469120" y="1631759"/>
+            <a:ext cx="355600" cy="174625"/>
           </a:xfrm>
           <a:prstGeom prst="rect">
             <a:avLst/>
@@ -3682,7 +3682,7 @@
               <a:buNone/>
             </a:pPr>
             <a:r>
-              <a:rPr lang="en-US" altLang="ko-KR" sz="2400" b="1" dirty="0">
+              <a:rPr lang="en-US" altLang="ko-KR" sz="1100" b="1" dirty="0">
                 <a:solidFill>
                   <a:srgbClr val="1F2937"/>
                 </a:solidFill>
@@ -3692,7 +3692,7 @@
               </a:rPr>
               <a:t>(g)</a:t>
             </a:r>
-            <a:endParaRPr lang="ko-KR" sz="2400" dirty="0"/>
+            <a:endParaRPr lang="ko-KR" sz="1100" dirty="0"/>
           </a:p>
         </p:txBody>
       </p:sp>

--- a/dist/초3/수학/도형과측정/초3_수학_도형과측정_07_무게_학생용.pptx
+++ b/dist/초3/수학/도형과측정/초3_수학_도형과측정_07_무게_학생용.pptx
@@ -121,13 +121,13 @@
   <p:extLst>
     <p:ext uri="{521415D9-36F7-43E2-AB2F-B90AF26B5E84}">
       <p14:sectionLst xmlns:p14="http://schemas.microsoft.com/office/powerpoint/2010/main">
-        <p14:section name="도입" id="{4cafaefd-4c3a-66e4-c5fb-d63ee2979ded}">
+        <p14:section name="도입" id="{17c2d173-0d6e-0fd6-3da3-795ae07d0133}">
           <p14:sldIdLst>
             <p14:sldId id="256"/>
             <p14:sldId id="257"/>
           </p14:sldIdLst>
         </p14:section>
-        <p14:section name="개념" id="{412ef680-987e-2d5e-d205-2e03a91f06bc}">
+        <p14:section name="개념" id="{d4837336-2a78-93d0-f91a-b39d14157384}">
           <p14:sldIdLst>
             <p14:sldId id="258"/>
             <p14:sldId id="259"/>
@@ -137,31 +137,31 @@
             <p14:sldId id="265"/>
           </p14:sldIdLst>
         </p14:section>
-        <p14:section name="연습" id="{611028aa-f2d7-e9d2-034f-1a2d631eac6f}">
+        <p14:section name="연습" id="{53e87246-28e1-d212-26ce-0b501de46717}">
           <p14:sldIdLst>
             <p14:sldId id="262"/>
             <p14:sldId id="263"/>
             <p14:sldId id="266"/>
           </p14:sldIdLst>
         </p14:section>
-        <p14:section name="개념" id="{82f8c273-223d-be0c-33ba-8578886e499c}">
+        <p14:section name="개념" id="{941a3251-02a0-97bf-2d5d-a8ecf3b33844}">
           <p14:sldIdLst/>
         </p14:section>
-        <p14:section name="연습" id="{32a3b8a4-9266-dc9f-9205-8e2d815ccfa8}">
+        <p14:section name="연습" id="{7784e0fb-4957-d171-bd14-c98ab7b65ebf}">
           <p14:sldIdLst/>
         </p14:section>
-        <p14:section name="확인" id="{719d15ee-3275-1940-5f6b-460f5752b549}">
+        <p14:section name="확인" id="{51788c66-58c6-e72b-39b7-712790b2a06a}">
           <p14:sldIdLst>
             <p14:sldId id="267"/>
             <p14:sldId id="268"/>
           </p14:sldIdLst>
         </p14:section>
-        <p14:section name="정리" id="{8e39367c-e8b8-14e1-fd62-2c48741203ff}">
+        <p14:section name="정리" id="{9c0d33c0-558c-1b3d-c5af-ab64306517fc}">
           <p14:sldIdLst>
             <p14:sldId id="269"/>
           </p14:sldIdLst>
         </p14:section>
-        <p14:section name="보충" id="{76db57a1-b708-e87e-4ff3-40a8db5380be}">
+        <p14:section name="보충" id="{3de6e31b-664d-366f-8e5a-dc9ff748597a}">
           <p14:sldIdLst>
             <p14:sldId id="270"/>
           </p14:sldIdLst>

--- a/dist/초3/수학/도형과측정/초3_수학_도형과측정_07_무게_학생용.pptx
+++ b/dist/초3/수학/도형과측정/초3_수학_도형과측정_07_무게_학생용.pptx
@@ -121,13 +121,13 @@
   <p:extLst>
     <p:ext uri="{521415D9-36F7-43E2-AB2F-B90AF26B5E84}">
       <p14:sectionLst xmlns:p14="http://schemas.microsoft.com/office/powerpoint/2010/main">
-        <p14:section name="도입" id="{17c2d173-0d6e-0fd6-3da3-795ae07d0133}">
+        <p14:section name="도입" id="{d048ccff-cfcb-2dc7-fedb-1e29e42cf609}">
           <p14:sldIdLst>
             <p14:sldId id="256"/>
             <p14:sldId id="257"/>
           </p14:sldIdLst>
         </p14:section>
-        <p14:section name="개념" id="{d4837336-2a78-93d0-f91a-b39d14157384}">
+        <p14:section name="개념" id="{d8af2c12-2848-b108-9568-a4bf905e742d}">
           <p14:sldIdLst>
             <p14:sldId id="258"/>
             <p14:sldId id="259"/>
@@ -137,31 +137,31 @@
             <p14:sldId id="265"/>
           </p14:sldIdLst>
         </p14:section>
-        <p14:section name="연습" id="{53e87246-28e1-d212-26ce-0b501de46717}">
+        <p14:section name="연습" id="{a46a152d-2ff7-f283-00c8-e51824c61b90}">
           <p14:sldIdLst>
             <p14:sldId id="262"/>
             <p14:sldId id="263"/>
             <p14:sldId id="266"/>
           </p14:sldIdLst>
         </p14:section>
-        <p14:section name="개념" id="{941a3251-02a0-97bf-2d5d-a8ecf3b33844}">
+        <p14:section name="개념" id="{650cab98-00f6-6b02-f9b4-b1721752e558}">
           <p14:sldIdLst/>
         </p14:section>
-        <p14:section name="연습" id="{7784e0fb-4957-d171-bd14-c98ab7b65ebf}">
+        <p14:section name="연습" id="{bbc0d150-5c2c-e12d-487f-6030fba0ccd9}">
           <p14:sldIdLst/>
         </p14:section>
-        <p14:section name="확인" id="{51788c66-58c6-e72b-39b7-712790b2a06a}">
+        <p14:section name="확인" id="{a3d431a8-a486-0295-8b83-9bd9e650ecab}">
           <p14:sldIdLst>
             <p14:sldId id="267"/>
             <p14:sldId id="268"/>
           </p14:sldIdLst>
         </p14:section>
-        <p14:section name="정리" id="{9c0d33c0-558c-1b3d-c5af-ab64306517fc}">
+        <p14:section name="정리" id="{ca45eef3-098f-c214-c967-f1c2703a25c2}">
           <p14:sldIdLst>
             <p14:sldId id="269"/>
           </p14:sldIdLst>
         </p14:section>
-        <p14:section name="보충" id="{3de6e31b-664d-366f-8e5a-dc9ff748597a}">
+        <p14:section name="보충" id="{ae190dd7-bdff-83cf-59bb-700a40ca7161}">
           <p14:sldIdLst>
             <p14:sldId id="270"/>
           </p14:sldIdLst>
@@ -3509,8 +3509,8 @@
         </p:nvSpPr>
         <p:spPr>
           <a:xfrm>
-            <a:off x="9545955" y="1275143"/>
-            <a:ext cx="201930" cy="174625"/>
+            <a:off x="9554337" y="1291018"/>
+            <a:ext cx="185166" cy="142875"/>
           </a:xfrm>
           <a:prstGeom prst="rect">
             <a:avLst/>
@@ -3526,7 +3526,7 @@
               <a:buNone/>
             </a:pPr>
             <a:r>
-              <a:rPr lang="ko-KR" altLang="en-US" sz="1100" b="1" dirty="0">
+              <a:rPr lang="ko-KR" altLang="en-US" sz="900" b="1" dirty="0">
                 <a:solidFill>
                   <a:srgbClr val="1F2937"/>
                 </a:solidFill>
@@ -3536,7 +3536,7 @@
               </a:rPr>
               <a:t>0</a:t>
             </a:r>
-            <a:endParaRPr lang="ko-KR" sz="1100" dirty="0"/>
+            <a:endParaRPr lang="ko-KR" sz="900" dirty="0"/>
           </a:p>
         </p:txBody>
       </p:sp>
@@ -3548,8 +3548,8 @@
         </p:nvSpPr>
         <p:spPr>
           <a:xfrm>
-            <a:off x="10194417" y="2015807"/>
-            <a:ext cx="386334" cy="174625"/>
+            <a:off x="10219563" y="2031682"/>
+            <a:ext cx="336042" cy="142875"/>
           </a:xfrm>
           <a:prstGeom prst="rect">
             <a:avLst/>
@@ -3565,7 +3565,7 @@
               <a:buNone/>
             </a:pPr>
             <a:r>
-              <a:rPr lang="ko-KR" altLang="en-US" sz="1100" b="1" dirty="0">
+              <a:rPr lang="ko-KR" altLang="en-US" sz="900" b="1" dirty="0">
                 <a:solidFill>
                   <a:srgbClr val="1F2937"/>
                 </a:solidFill>
@@ -3575,7 +3575,7 @@
               </a:rPr>
               <a:t>500</a:t>
             </a:r>
-            <a:endParaRPr lang="ko-KR" sz="1100" dirty="0"/>
+            <a:endParaRPr lang="ko-KR" sz="900" dirty="0"/>
           </a:p>
         </p:txBody>
       </p:sp>
@@ -3587,8 +3587,8 @@
         </p:nvSpPr>
         <p:spPr>
           <a:xfrm>
-            <a:off x="9407652" y="2756472"/>
-            <a:ext cx="478536" cy="174625"/>
+            <a:off x="9441180" y="2772347"/>
+            <a:ext cx="411480" cy="142875"/>
           </a:xfrm>
           <a:prstGeom prst="rect">
             <a:avLst/>
@@ -3604,7 +3604,7 @@
               <a:buNone/>
             </a:pPr>
             <a:r>
-              <a:rPr lang="ko-KR" altLang="en-US" sz="1100" b="1" dirty="0">
+              <a:rPr lang="ko-KR" altLang="en-US" sz="900" b="1" dirty="0">
                 <a:solidFill>
                   <a:srgbClr val="1F2937"/>
                 </a:solidFill>
@@ -3614,7 +3614,7 @@
               </a:rPr>
               <a:t>1000</a:t>
             </a:r>
-            <a:endParaRPr lang="ko-KR" sz="1100" dirty="0"/>
+            <a:endParaRPr lang="ko-KR" sz="900" dirty="0"/>
           </a:p>
         </p:txBody>
       </p:sp>
@@ -3626,8 +3626,8 @@
         </p:nvSpPr>
         <p:spPr>
           <a:xfrm>
-            <a:off x="8666988" y="2015807"/>
-            <a:ext cx="478536" cy="174625"/>
+            <a:off x="8700516" y="2031682"/>
+            <a:ext cx="411480" cy="142875"/>
           </a:xfrm>
           <a:prstGeom prst="rect">
             <a:avLst/>
@@ -3643,7 +3643,7 @@
               <a:buNone/>
             </a:pPr>
             <a:r>
-              <a:rPr lang="ko-KR" altLang="en-US" sz="1100" b="1" dirty="0">
+              <a:rPr lang="ko-KR" altLang="en-US" sz="900" b="1" dirty="0">
                 <a:solidFill>
                   <a:srgbClr val="1F2937"/>
                 </a:solidFill>
@@ -3653,7 +3653,7 @@
               </a:rPr>
               <a:t>1500</a:t>
             </a:r>
-            <a:endParaRPr lang="ko-KR" sz="1100" dirty="0"/>
+            <a:endParaRPr lang="ko-KR" sz="900" dirty="0"/>
           </a:p>
         </p:txBody>
       </p:sp>
@@ -3665,8 +3665,8 @@
         </p:nvSpPr>
         <p:spPr>
           <a:xfrm>
-            <a:off x="9469120" y="1631759"/>
-            <a:ext cx="355600" cy="174625"/>
+            <a:off x="9491472" y="1647635"/>
+            <a:ext cx="310896" cy="142875"/>
           </a:xfrm>
           <a:prstGeom prst="rect">
             <a:avLst/>
@@ -3682,7 +3682,7 @@
               <a:buNone/>
             </a:pPr>
             <a:r>
-              <a:rPr lang="en-US" altLang="ko-KR" sz="1100" b="1" dirty="0">
+              <a:rPr lang="en-US" altLang="ko-KR" sz="900" b="1" dirty="0">
                 <a:solidFill>
                   <a:srgbClr val="1F2937"/>
                 </a:solidFill>
@@ -3692,7 +3692,7 @@
               </a:rPr>
               <a:t>(g)</a:t>
             </a:r>
-            <a:endParaRPr lang="ko-KR" sz="1100" dirty="0"/>
+            <a:endParaRPr lang="ko-KR" sz="900" dirty="0"/>
           </a:p>
         </p:txBody>
       </p:sp>
@@ -8319,7 +8319,7 @@
                 <a:ea typeface="맑은 고딕" pitchFamily="34" charset="-122"/>
                 <a:cs typeface="맑은 고딕" pitchFamily="34" charset="-120"/>
               </a:rPr>
-              <a:t>다음 시간: 그림그래프</a:t>
+              <a:t>다음 시간: 길이의 덧셈과 뺄셈</a:t>
             </a:r>
             <a:endParaRPr lang="ko-KR" sz="2400" dirty="0"/>
           </a:p>
